--- a/examples/decorated-master.pptx
+++ b/examples/decorated-master.pptx
@@ -285,20 +285,11 @@
         <p:txBody>
           <a:bodyPr anchor="t"/>
           <a:lstStyle>
-            <a:lvl1pPr algn="l">
+            <a:lvl1pPr marL="0" indent="0" algn="l">
+              <a:buNone/>
               <a:defRPr sz="1800">
                 <a:solidFill>
                   <a:srgbClr val="DCE6F0"/>
-                </a:solidFill>
-              </a:defRPr>
-            </a:lvl1pPr>
-            <a:lvl1pPr marL="0" indent="0" algn="ctr">
-              <a:buNone/>
-              <a:defRPr>
-                <a:solidFill>
-                  <a:schemeClr val="tx1">
-                    <a:tint val="75000"/>
-                  </a:schemeClr>
                 </a:solidFill>
               </a:defRPr>
             </a:lvl1pPr>
@@ -701,14 +692,11 @@
           <a:bodyPr anchor="t"/>
           <a:lstStyle>
             <a:lvl1pPr algn="l">
-              <a:defRPr sz="3600" b="1">
+              <a:defRPr sz="3600" b="1" cap="all">
                 <a:solidFill>
                   <a:srgbClr val="0B3D91"/>
                 </a:solidFill>
               </a:defRPr>
-            </a:lvl1pPr>
-            <a:lvl1pPr algn="l">
-              <a:defRPr sz="4000" b="1" cap="all"/>
             </a:lvl1pPr>
           </a:lstStyle>
           <a:p>
@@ -739,20 +727,11 @@
         <p:txBody>
           <a:bodyPr anchor="b"/>
           <a:lstStyle>
-            <a:lvl1pPr algn="l">
+            <a:lvl1pPr marL="0" indent="0" algn="l">
+              <a:buNone/>
               <a:defRPr sz="1600">
                 <a:solidFill>
                   <a:srgbClr val="6E788C"/>
-                </a:solidFill>
-              </a:defRPr>
-            </a:lvl1pPr>
-            <a:lvl1pPr marL="0" indent="0">
-              <a:buNone/>
-              <a:defRPr sz="2000">
-                <a:solidFill>
-                  <a:schemeClr val="tx1">
-                    <a:tint val="75000"/>
-                  </a:schemeClr>
                 </a:solidFill>
               </a:defRPr>
             </a:lvl1pPr>
@@ -976,8 +955,8 @@
         </p:nvSpPr>
         <p:spPr>
           <a:xfrm>
-            <a:off x="838200" y="1783080"/>
-            <a:ext cx="5181600" cy="4526280"/>
+            <a:off x="731520" y="1783080"/>
+            <a:ext cx="5120640" cy="4526280"/>
           </a:xfrm>
         </p:spPr>
         <p:txBody>
@@ -1061,8 +1040,8 @@
         </p:nvSpPr>
         <p:spPr>
           <a:xfrm>
-            <a:off x="6172200" y="1783080"/>
-            <a:ext cx="5181600" cy="4526280"/>
+            <a:off x="6339840" y="1783080"/>
+            <a:ext cx="5120640" cy="4526280"/>
           </a:xfrm>
         </p:spPr>
         <p:txBody>
@@ -1669,15 +1648,15 @@
         </p:nvSpPr>
         <p:spPr>
           <a:xfrm>
-            <a:off x="838200" y="685800"/>
-            <a:ext cx="10515600" cy="1005840"/>
+            <a:off x="731520" y="685800"/>
+            <a:ext cx="10728960" cy="1005840"/>
           </a:xfrm>
           <a:prstGeom prst="rect">
             <a:avLst/>
           </a:prstGeom>
         </p:spPr>
         <p:txBody>
-          <a:bodyPr vert="horz" lIns="91440" tIns="45720" rIns="91440" bIns="45720" rtlCol="0" anchor="ctr">
+          <a:bodyPr vert="horz" lIns="91440" tIns="45720" rIns="91440" bIns="45720" rtlCol="0" anchor="b">
             <a:normAutofit/>
           </a:bodyPr>
           <a:lstStyle/>
@@ -1702,8 +1681,8 @@
         </p:nvSpPr>
         <p:spPr>
           <a:xfrm>
-            <a:off x="838200" y="1783080"/>
-            <a:ext cx="10515600" cy="4526280"/>
+            <a:off x="731520" y="1783080"/>
+            <a:ext cx="10728960" cy="4526280"/>
           </a:xfrm>
           <a:prstGeom prst="rect">
             <a:avLst/>
@@ -1778,15 +1757,6 @@
               <a:defRPr sz="900">
                 <a:solidFill>
                   <a:srgbClr val="6E788C"/>
-                </a:solidFill>
-              </a:defRPr>
-            </a:lvl1pPr>
-            <a:lvl1pPr algn="l">
-              <a:defRPr sz="1200">
-                <a:solidFill>
-                  <a:schemeClr val="tx1">
-                    <a:tint val="75000"/>
-                  </a:schemeClr>
                 </a:solidFill>
               </a:defRPr>
             </a:lvl1pPr>
@@ -1871,15 +1841,6 @@
               <a:defRPr sz="900">
                 <a:solidFill>
                   <a:srgbClr val="6E788C"/>
-                </a:solidFill>
-              </a:defRPr>
-            </a:lvl1pPr>
-            <a:lvl1pPr algn="r">
-              <a:defRPr sz="1200">
-                <a:solidFill>
-                  <a:schemeClr val="tx1">
-                    <a:tint val="75000"/>
-                  </a:schemeClr>
                 </a:solidFill>
               </a:defRPr>
             </a:lvl1pPr>
@@ -1916,7 +1877,7 @@
           <a:spcPct val="0"/>
         </a:spcBef>
         <a:buNone/>
-        <a:defRPr sz="4400" kern="1200">
+        <a:defRPr sz="3200" kern="1200">
           <a:solidFill>
             <a:schemeClr val="tx1"/>
           </a:solidFill>
@@ -1927,13 +1888,13 @@
       </a:lvl1pPr>
     </p:titleStyle>
     <p:bodyStyle>
-      <a:lvl1pPr marL="342900" indent="-342900" algn="l" defTabSz="457200" rtl="0" eaLnBrk="1" latinLnBrk="0" hangingPunct="1">
+      <a:lvl1pPr marL="365760" indent="-365760" algn="l" defTabSz="457200" rtl="0" eaLnBrk="1" latinLnBrk="0" hangingPunct="1">
         <a:spcBef>
           <a:spcPct val="20000"/>
         </a:spcBef>
         <a:buFont typeface="Arial"/>
         <a:buChar char="•"/>
-        <a:defRPr sz="3200" kern="1200">
+        <a:defRPr sz="1800" kern="1200">
           <a:solidFill>
             <a:schemeClr val="tx1"/>
           </a:solidFill>
@@ -1942,13 +1903,13 @@
           <a:cs typeface="+mn-cs"/>
         </a:defRPr>
       </a:lvl1pPr>
-      <a:lvl2pPr marL="742950" indent="-285750" algn="l" defTabSz="457200" rtl="0" eaLnBrk="1" latinLnBrk="0" hangingPunct="1">
+      <a:lvl2pPr marL="650240" indent="-325120" algn="l" defTabSz="457200" rtl="0" eaLnBrk="1" latinLnBrk="0" hangingPunct="1">
         <a:spcBef>
           <a:spcPct val="20000"/>
         </a:spcBef>
         <a:buFont typeface="Arial"/>
         <a:buChar char="–"/>
-        <a:defRPr sz="2800" kern="1200">
+        <a:defRPr sz="1600" kern="1200">
           <a:solidFill>
             <a:schemeClr val="tx1"/>
           </a:solidFill>
@@ -1957,13 +1918,13 @@
           <a:cs typeface="+mn-cs"/>
         </a:defRPr>
       </a:lvl2pPr>
-      <a:lvl3pPr marL="1143000" indent="-228600" algn="l" defTabSz="457200" rtl="0" eaLnBrk="1" latinLnBrk="0" hangingPunct="1">
+      <a:lvl3pPr marL="853440" indent="-284480" algn="l" defTabSz="457200" rtl="0" eaLnBrk="1" latinLnBrk="0" hangingPunct="1">
         <a:spcBef>
           <a:spcPct val="20000"/>
         </a:spcBef>
         <a:buFont typeface="Arial"/>
         <a:buChar char="•"/>
-        <a:defRPr sz="2400" kern="1200">
+        <a:defRPr sz="1400" kern="1200">
           <a:solidFill>
             <a:schemeClr val="tx1"/>
           </a:solidFill>
@@ -1972,13 +1933,13 @@
           <a:cs typeface="+mn-cs"/>
         </a:defRPr>
       </a:lvl3pPr>
-      <a:lvl4pPr marL="1600200" indent="-228600" algn="l" defTabSz="457200" rtl="0" eaLnBrk="1" latinLnBrk="0" hangingPunct="1">
+      <a:lvl4pPr marL="975360" indent="-243840" algn="l" defTabSz="457200" rtl="0" eaLnBrk="1" latinLnBrk="0" hangingPunct="1">
         <a:spcBef>
           <a:spcPct val="20000"/>
         </a:spcBef>
         <a:buFont typeface="Arial"/>
         <a:buChar char="–"/>
-        <a:defRPr sz="2000" kern="1200">
+        <a:defRPr sz="1200" kern="1200">
           <a:solidFill>
             <a:schemeClr val="tx1"/>
           </a:solidFill>
@@ -1987,13 +1948,13 @@
           <a:cs typeface="+mn-cs"/>
         </a:defRPr>
       </a:lvl4pPr>
-      <a:lvl5pPr marL="2057400" indent="-228600" algn="l" defTabSz="457200" rtl="0" eaLnBrk="1" latinLnBrk="0" hangingPunct="1">
+      <a:lvl5pPr marL="1219200" indent="-243840" algn="l" defTabSz="457200" rtl="0" eaLnBrk="1" latinLnBrk="0" hangingPunct="1">
         <a:spcBef>
           <a:spcPct val="20000"/>
         </a:spcBef>
         <a:buFont typeface="Arial"/>
         <a:buChar char="»"/>
-        <a:defRPr sz="2000" kern="1200">
+        <a:defRPr sz="1200" kern="1200">
           <a:solidFill>
             <a:schemeClr val="tx1"/>
           </a:solidFill>
